--- a/Credential for Interview/Monex_Sharma.pptx
+++ b/Credential for Interview/Monex_Sharma.pptx
@@ -298,7 +298,7 @@
             <a:pPr algn="r">
               <a:buNone/>
             </a:pPr>
-            <a:fld id="{1CBA0485-213C-4D89-A43D-B7BDAE8145B7}" type="slidenum">
+            <a:fld id="{091C152A-6FB0-4EE1-B10B-8C0F55BD41D8}" type="slidenum">
               <a:rPr b="0" lang="en-US" sz="1400" spc="-1" strike="noStrike">
                 <a:latin typeface="Times New Roman"/>
               </a:rPr>
@@ -346,7 +346,7 @@
         <p:spPr>
           <a:xfrm>
             <a:off x="685800" y="1143000"/>
-            <a:ext cx="5485320" cy="3085200"/>
+            <a:ext cx="5484960" cy="3084840"/>
           </a:xfrm>
           <a:prstGeom prst="rect">
             <a:avLst/>
@@ -369,7 +369,7 @@
         <p:spPr>
           <a:xfrm>
             <a:off x="685800" y="4400640"/>
-            <a:ext cx="5485320" cy="3599280"/>
+            <a:ext cx="5484960" cy="3598920"/>
           </a:xfrm>
           <a:prstGeom prst="rect">
             <a:avLst/>
@@ -418,7 +418,7 @@
         <p:spPr>
           <a:xfrm>
             <a:off x="3884760" y="8685360"/>
-            <a:ext cx="2970720" cy="457560"/>
+            <a:ext cx="2970360" cy="457200"/>
           </a:xfrm>
           <a:prstGeom prst="rect">
             <a:avLst/>
@@ -454,7 +454,7 @@
               </a:lnSpc>
               <a:buNone/>
             </a:pPr>
-            <a:fld id="{115BEC0B-DB02-4441-B9A4-099A4CF9EBA9}" type="slidenum">
+            <a:fld id="{1821DB31-E8DB-4A15-878F-E3978E6F8CD3}" type="slidenum">
               <a:rPr b="0" lang="en-US" sz="1200" spc="-1" strike="noStrike">
                 <a:solidFill>
                   <a:srgbClr val="000000"/>
@@ -505,7 +505,7 @@
         <p:spPr>
           <a:xfrm>
             <a:off x="685800" y="1143000"/>
-            <a:ext cx="5485320" cy="3085200"/>
+            <a:ext cx="5484960" cy="3084840"/>
           </a:xfrm>
           <a:prstGeom prst="rect">
             <a:avLst/>
@@ -528,7 +528,7 @@
         <p:spPr>
           <a:xfrm>
             <a:off x="685800" y="4400640"/>
-            <a:ext cx="5485320" cy="3599280"/>
+            <a:ext cx="5484960" cy="3598920"/>
           </a:xfrm>
           <a:prstGeom prst="rect">
             <a:avLst/>
@@ -577,7 +577,7 @@
         <p:spPr>
           <a:xfrm>
             <a:off x="3884760" y="8685360"/>
-            <a:ext cx="2970720" cy="457560"/>
+            <a:ext cx="2970360" cy="457200"/>
           </a:xfrm>
           <a:prstGeom prst="rect">
             <a:avLst/>
@@ -613,7 +613,7 @@
               </a:lnSpc>
               <a:buNone/>
             </a:pPr>
-            <a:fld id="{D7D59460-9428-40BE-A2E0-E13CB812F8BF}" type="slidenum">
+            <a:fld id="{316EBCF5-36AC-4845-99FA-93DECD3CBF2D}" type="slidenum">
               <a:rPr b="0" lang="en-US" sz="1200" spc="-1" strike="noStrike">
                 <a:solidFill>
                   <a:srgbClr val="000000"/>
@@ -664,7 +664,7 @@
         <p:spPr>
           <a:xfrm>
             <a:off x="685800" y="1143000"/>
-            <a:ext cx="5485320" cy="3085200"/>
+            <a:ext cx="5484960" cy="3084840"/>
           </a:xfrm>
           <a:prstGeom prst="rect">
             <a:avLst/>
@@ -687,7 +687,7 @@
         <p:spPr>
           <a:xfrm>
             <a:off x="685800" y="4400640"/>
-            <a:ext cx="5485320" cy="3599280"/>
+            <a:ext cx="5484960" cy="3598920"/>
           </a:xfrm>
           <a:prstGeom prst="rect">
             <a:avLst/>
@@ -736,7 +736,7 @@
         <p:spPr>
           <a:xfrm>
             <a:off x="3884760" y="8685360"/>
-            <a:ext cx="2970720" cy="457560"/>
+            <a:ext cx="2970360" cy="457200"/>
           </a:xfrm>
           <a:prstGeom prst="rect">
             <a:avLst/>
@@ -772,7 +772,7 @@
               </a:lnSpc>
               <a:buNone/>
             </a:pPr>
-            <a:fld id="{4EDE1DA7-1263-48A7-8AB4-E6C36B784C78}" type="slidenum">
+            <a:fld id="{9D57F976-DCE2-43E0-8DDE-30DC3D1BEF47}" type="slidenum">
               <a:rPr b="0" lang="en-US" sz="1200" spc="-1" strike="noStrike">
                 <a:solidFill>
                   <a:srgbClr val="000000"/>
@@ -823,7 +823,7 @@
         <p:spPr>
           <a:xfrm>
             <a:off x="685800" y="1143000"/>
-            <a:ext cx="5485320" cy="3085200"/>
+            <a:ext cx="5484960" cy="3084840"/>
           </a:xfrm>
           <a:prstGeom prst="rect">
             <a:avLst/>
@@ -846,7 +846,7 @@
         <p:spPr>
           <a:xfrm>
             <a:off x="685800" y="4400640"/>
-            <a:ext cx="5485320" cy="3599280"/>
+            <a:ext cx="5484960" cy="3598920"/>
           </a:xfrm>
           <a:prstGeom prst="rect">
             <a:avLst/>
@@ -895,7 +895,7 @@
         <p:spPr>
           <a:xfrm>
             <a:off x="3884760" y="8685360"/>
-            <a:ext cx="2970720" cy="457560"/>
+            <a:ext cx="2970360" cy="457200"/>
           </a:xfrm>
           <a:prstGeom prst="rect">
             <a:avLst/>
@@ -931,7 +931,7 @@
               </a:lnSpc>
               <a:buNone/>
             </a:pPr>
-            <a:fld id="{9576D4F9-4BF2-4F7E-9F69-EBD9176C94F9}" type="slidenum">
+            <a:fld id="{9D6F4C61-8684-4EAD-BDCF-1AF08AF70CAB}" type="slidenum">
               <a:rPr b="0" lang="en-US" sz="1200" spc="-1" strike="noStrike">
                 <a:solidFill>
                   <a:srgbClr val="000000"/>
@@ -982,7 +982,7 @@
         <p:spPr>
           <a:xfrm>
             <a:off x="685800" y="1143000"/>
-            <a:ext cx="5485320" cy="3085200"/>
+            <a:ext cx="5484960" cy="3084840"/>
           </a:xfrm>
           <a:prstGeom prst="rect">
             <a:avLst/>
@@ -1005,7 +1005,7 @@
         <p:spPr>
           <a:xfrm>
             <a:off x="685800" y="4400640"/>
-            <a:ext cx="5485320" cy="3599280"/>
+            <a:ext cx="5484960" cy="3598920"/>
           </a:xfrm>
           <a:prstGeom prst="rect">
             <a:avLst/>
@@ -1054,7 +1054,7 @@
         <p:spPr>
           <a:xfrm>
             <a:off x="3884760" y="8685360"/>
-            <a:ext cx="2970720" cy="457560"/>
+            <a:ext cx="2970360" cy="457200"/>
           </a:xfrm>
           <a:prstGeom prst="rect">
             <a:avLst/>
@@ -1090,7 +1090,7 @@
               </a:lnSpc>
               <a:buNone/>
             </a:pPr>
-            <a:fld id="{65AC5BD8-A06B-427E-96FB-FDB99BFA62BC}" type="slidenum">
+            <a:fld id="{12030575-4F30-42EE-BE0C-DABD0105A9F7}" type="slidenum">
               <a:rPr b="0" lang="en-US" sz="1200" spc="-1" strike="noStrike">
                 <a:solidFill>
                   <a:srgbClr val="000000"/>
@@ -2938,7 +2938,7 @@
         <p:spPr>
           <a:xfrm>
             <a:off x="685800" y="914400"/>
-            <a:ext cx="6033960" cy="684720"/>
+            <a:ext cx="6033600" cy="684360"/>
           </a:xfrm>
           <a:prstGeom prst="rect">
             <a:avLst/>
@@ -2993,7 +2993,7 @@
         <p:spPr>
           <a:xfrm>
             <a:off x="685800" y="1627560"/>
-            <a:ext cx="6033960" cy="364680"/>
+            <a:ext cx="6033600" cy="364320"/>
           </a:xfrm>
           <a:prstGeom prst="rect">
             <a:avLst/>
@@ -3048,7 +3048,7 @@
         <p:spPr>
           <a:xfrm>
             <a:off x="685800" y="2286000"/>
-            <a:ext cx="5851080" cy="1187640"/>
+            <a:ext cx="5850720" cy="1187280"/>
           </a:xfrm>
           <a:prstGeom prst="roundRect">
             <a:avLst>
@@ -3078,7 +3078,7 @@
         <p:spPr>
           <a:xfrm>
             <a:off x="960120" y="2441520"/>
-            <a:ext cx="5302440" cy="254880"/>
+            <a:ext cx="5302080" cy="254520"/>
           </a:xfrm>
           <a:prstGeom prst="rect">
             <a:avLst/>
@@ -3109,7 +3109,7 @@
               </a:tabLst>
             </a:pPr>
             <a:r>
-              <a:rPr b="1" lang="en-US" sz="1000" spc="194" strike="noStrike">
+              <a:rPr b="1" lang="en-US" sz="1000" spc="191" strike="noStrike">
                 <a:solidFill>
                   <a:srgbClr val="f4a259"/>
                 </a:solidFill>
@@ -3133,7 +3133,7 @@
         <p:spPr>
           <a:xfrm>
             <a:off x="960120" y="2724840"/>
-            <a:ext cx="5302440" cy="657360"/>
+            <a:ext cx="5302080" cy="657000"/>
           </a:xfrm>
           <a:prstGeom prst="rect">
             <a:avLst/>
@@ -3188,7 +3188,7 @@
         <p:spPr>
           <a:xfrm>
             <a:off x="685800" y="3823920"/>
-            <a:ext cx="401400" cy="401400"/>
+            <a:ext cx="401040" cy="401040"/>
           </a:xfrm>
           <a:prstGeom prst="ellipse">
             <a:avLst/>
@@ -3220,7 +3220,7 @@
         <p:spPr>
           <a:xfrm>
             <a:off x="794520" y="3932640"/>
-            <a:ext cx="183960" cy="183960"/>
+            <a:ext cx="183600" cy="183600"/>
           </a:xfrm>
           <a:prstGeom prst="rect">
             <a:avLst/>
@@ -3239,7 +3239,7 @@
         <p:spPr>
           <a:xfrm>
             <a:off x="1261800" y="3806280"/>
-            <a:ext cx="5393880" cy="364680"/>
+            <a:ext cx="5393520" cy="364320"/>
           </a:xfrm>
           <a:prstGeom prst="rect">
             <a:avLst/>
@@ -3294,7 +3294,7 @@
         <p:spPr>
           <a:xfrm>
             <a:off x="685800" y="4537800"/>
-            <a:ext cx="401400" cy="401400"/>
+            <a:ext cx="401040" cy="401040"/>
           </a:xfrm>
           <a:prstGeom prst="ellipse">
             <a:avLst/>
@@ -3326,7 +3326,7 @@
         <p:spPr>
           <a:xfrm>
             <a:off x="794520" y="4610520"/>
-            <a:ext cx="183960" cy="183960"/>
+            <a:ext cx="183600" cy="183600"/>
           </a:xfrm>
           <a:prstGeom prst="rect">
             <a:avLst/>
@@ -3345,7 +3345,7 @@
         <p:spPr>
           <a:xfrm>
             <a:off x="1261800" y="4556160"/>
-            <a:ext cx="5393880" cy="364680"/>
+            <a:ext cx="5393520" cy="364320"/>
           </a:xfrm>
           <a:prstGeom prst="rect">
             <a:avLst/>
@@ -3436,7 +3436,7 @@
         <p:spPr>
           <a:xfrm>
             <a:off x="685800" y="5863680"/>
-            <a:ext cx="401400" cy="401400"/>
+            <a:ext cx="401040" cy="401040"/>
           </a:xfrm>
           <a:prstGeom prst="ellipse">
             <a:avLst/>
@@ -3468,7 +3468,7 @@
         <p:spPr>
           <a:xfrm>
             <a:off x="794520" y="5972040"/>
-            <a:ext cx="183960" cy="183960"/>
+            <a:ext cx="183600" cy="183600"/>
           </a:xfrm>
           <a:prstGeom prst="rect">
             <a:avLst/>
@@ -3487,7 +3487,7 @@
         <p:spPr>
           <a:xfrm>
             <a:off x="1261800" y="5845680"/>
-            <a:ext cx="5393880" cy="364680"/>
+            <a:ext cx="5393520" cy="364320"/>
           </a:xfrm>
           <a:prstGeom prst="rect">
             <a:avLst/>
@@ -3542,7 +3542,7 @@
         <p:spPr>
           <a:xfrm>
             <a:off x="7471800" y="5176800"/>
-            <a:ext cx="4114440" cy="273240"/>
+            <a:ext cx="4114080" cy="272880"/>
           </a:xfrm>
           <a:prstGeom prst="rect">
             <a:avLst/>
@@ -3602,13 +3602,13 @@
         </p:nvPicPr>
         <p:blipFill>
           <a:blip r:embed="rId4"/>
-          <a:srcRect l="0" t="0" r="49562" b="49105"/>
+          <a:srcRect l="0" t="0" r="49555" b="49098"/>
           <a:stretch/>
         </p:blipFill>
         <p:spPr>
           <a:xfrm>
             <a:off x="7014600" y="2718000"/>
-            <a:ext cx="2190240" cy="2190240"/>
+            <a:ext cx="2189880" cy="2189880"/>
           </a:xfrm>
           <a:prstGeom prst="rect">
             <a:avLst/>
@@ -3626,13 +3626,13 @@
         </p:nvPicPr>
         <p:blipFill>
           <a:blip r:embed="rId5"/>
-          <a:srcRect l="33519" t="4283" r="31428" b="48762"/>
+          <a:srcRect l="33514" t="4283" r="31422" b="48752"/>
           <a:stretch/>
         </p:blipFill>
         <p:spPr>
           <a:xfrm>
             <a:off x="9372960" y="2790000"/>
-            <a:ext cx="2513880" cy="2101680"/>
+            <a:ext cx="2513520" cy="2101320"/>
           </a:xfrm>
           <a:prstGeom prst="rect">
             <a:avLst/>
@@ -3651,7 +3651,7 @@
         <p:spPr>
           <a:xfrm>
             <a:off x="1189800" y="5182560"/>
-            <a:ext cx="4800240" cy="734760"/>
+            <a:ext cx="4799880" cy="734400"/>
           </a:xfrm>
           <a:prstGeom prst="rect">
             <a:avLst/>
@@ -3703,7 +3703,7 @@
         <p:spPr>
           <a:xfrm>
             <a:off x="685800" y="5221800"/>
-            <a:ext cx="456840" cy="456840"/>
+            <a:ext cx="456480" cy="456480"/>
           </a:xfrm>
           <a:prstGeom prst="ellipse">
             <a:avLst/>
@@ -3736,7 +3736,7 @@
         <p:spPr>
           <a:xfrm>
             <a:off x="793800" y="5309640"/>
-            <a:ext cx="228240" cy="241560"/>
+            <a:ext cx="227880" cy="241200"/>
           </a:xfrm>
           <a:prstGeom prst="rect">
             <a:avLst/>
@@ -3792,7 +3792,7 @@
         <p:spPr>
           <a:xfrm>
             <a:off x="685800" y="548640"/>
-            <a:ext cx="7314120" cy="547560"/>
+            <a:ext cx="7313760" cy="547200"/>
           </a:xfrm>
           <a:prstGeom prst="rect">
             <a:avLst/>
@@ -3847,7 +3847,7 @@
         <p:spPr>
           <a:xfrm>
             <a:off x="685800" y="1417320"/>
-            <a:ext cx="5119560" cy="273240"/>
+            <a:ext cx="5119200" cy="272880"/>
           </a:xfrm>
           <a:prstGeom prst="rect">
             <a:avLst/>
@@ -3878,7 +3878,7 @@
               </a:tabLst>
             </a:pPr>
             <a:r>
-              <a:rPr b="1" lang="en-US" sz="1100" spc="194" strike="noStrike">
+              <a:rPr b="1" lang="en-US" sz="1100" spc="191" strike="noStrike">
                 <a:solidFill>
                   <a:srgbClr val="1b9aaa"/>
                 </a:solidFill>
@@ -3902,7 +3902,7 @@
         <p:spPr>
           <a:xfrm>
             <a:off x="685800" y="1847160"/>
-            <a:ext cx="5028120" cy="639000"/>
+            <a:ext cx="5027760" cy="638640"/>
           </a:xfrm>
           <a:prstGeom prst="roundRect">
             <a:avLst>
@@ -3936,7 +3936,7 @@
         <p:spPr>
           <a:xfrm>
             <a:off x="914400" y="2002680"/>
-            <a:ext cx="327960" cy="327960"/>
+            <a:ext cx="327600" cy="327600"/>
           </a:xfrm>
           <a:prstGeom prst="rect">
             <a:avLst/>
@@ -3955,7 +3955,7 @@
         <p:spPr>
           <a:xfrm>
             <a:off x="1371600" y="1847160"/>
-            <a:ext cx="4205160" cy="639000"/>
+            <a:ext cx="4204800" cy="638640"/>
           </a:xfrm>
           <a:prstGeom prst="rect">
             <a:avLst/>
@@ -4010,7 +4010,7 @@
         <p:spPr>
           <a:xfrm>
             <a:off x="685800" y="2651760"/>
-            <a:ext cx="5028120" cy="639000"/>
+            <a:ext cx="5027760" cy="638640"/>
           </a:xfrm>
           <a:prstGeom prst="roundRect">
             <a:avLst>
@@ -4044,7 +4044,7 @@
         <p:spPr>
           <a:xfrm>
             <a:off x="914400" y="2807280"/>
-            <a:ext cx="327960" cy="327960"/>
+            <a:ext cx="327600" cy="327600"/>
           </a:xfrm>
           <a:prstGeom prst="rect">
             <a:avLst/>
@@ -4063,7 +4063,7 @@
         <p:spPr>
           <a:xfrm>
             <a:off x="1371600" y="2651760"/>
-            <a:ext cx="4205160" cy="639000"/>
+            <a:ext cx="4204800" cy="638640"/>
           </a:xfrm>
           <a:prstGeom prst="rect">
             <a:avLst/>
@@ -4118,7 +4118,7 @@
         <p:spPr>
           <a:xfrm>
             <a:off x="685800" y="3456360"/>
-            <a:ext cx="5028120" cy="639000"/>
+            <a:ext cx="5027760" cy="638640"/>
           </a:xfrm>
           <a:prstGeom prst="roundRect">
             <a:avLst>
@@ -4152,7 +4152,7 @@
         <p:spPr>
           <a:xfrm>
             <a:off x="914400" y="3611880"/>
-            <a:ext cx="327960" cy="327960"/>
+            <a:ext cx="327600" cy="327600"/>
           </a:xfrm>
           <a:prstGeom prst="rect">
             <a:avLst/>
@@ -4171,7 +4171,7 @@
         <p:spPr>
           <a:xfrm>
             <a:off x="1371600" y="3456360"/>
-            <a:ext cx="4205160" cy="639000"/>
+            <a:ext cx="4204800" cy="638640"/>
           </a:xfrm>
           <a:prstGeom prst="rect">
             <a:avLst/>
@@ -4226,7 +4226,7 @@
         <p:spPr>
           <a:xfrm>
             <a:off x="685800" y="4260960"/>
-            <a:ext cx="5028120" cy="639000"/>
+            <a:ext cx="5027760" cy="638640"/>
           </a:xfrm>
           <a:prstGeom prst="roundRect">
             <a:avLst>
@@ -4260,7 +4260,7 @@
         <p:spPr>
           <a:xfrm>
             <a:off x="914400" y="4416480"/>
-            <a:ext cx="327960" cy="327960"/>
+            <a:ext cx="327600" cy="327600"/>
           </a:xfrm>
           <a:prstGeom prst="rect">
             <a:avLst/>
@@ -4279,7 +4279,7 @@
         <p:spPr>
           <a:xfrm>
             <a:off x="1371600" y="4260960"/>
-            <a:ext cx="4205160" cy="639000"/>
+            <a:ext cx="4204800" cy="638640"/>
           </a:xfrm>
           <a:prstGeom prst="rect">
             <a:avLst/>
@@ -4334,7 +4334,7 @@
         <p:spPr>
           <a:xfrm>
             <a:off x="685800" y="5065920"/>
-            <a:ext cx="5028120" cy="639000"/>
+            <a:ext cx="5027760" cy="638640"/>
           </a:xfrm>
           <a:prstGeom prst="roundRect">
             <a:avLst>
@@ -4368,7 +4368,7 @@
         <p:spPr>
           <a:xfrm>
             <a:off x="914400" y="5221080"/>
-            <a:ext cx="327960" cy="327960"/>
+            <a:ext cx="327600" cy="327600"/>
           </a:xfrm>
           <a:prstGeom prst="rect">
             <a:avLst/>
@@ -4387,7 +4387,7 @@
         <p:spPr>
           <a:xfrm>
             <a:off x="1371600" y="5065920"/>
-            <a:ext cx="4205160" cy="639000"/>
+            <a:ext cx="4204800" cy="638640"/>
           </a:xfrm>
           <a:prstGeom prst="rect">
             <a:avLst/>
@@ -4442,7 +4442,7 @@
         <p:spPr>
           <a:xfrm>
             <a:off x="6400800" y="1417320"/>
-            <a:ext cx="5028120" cy="273240"/>
+            <a:ext cx="5027760" cy="272880"/>
           </a:xfrm>
           <a:prstGeom prst="rect">
             <a:avLst/>
@@ -4473,7 +4473,7 @@
               </a:tabLst>
             </a:pPr>
             <a:r>
-              <a:rPr b="1" lang="en-US" sz="1100" spc="194" strike="noStrike">
+              <a:rPr b="1" lang="en-US" sz="1100" spc="191" strike="noStrike">
                 <a:solidFill>
                   <a:srgbClr val="1b9aaa"/>
                 </a:solidFill>
@@ -4497,7 +4497,7 @@
         <p:spPr>
           <a:xfrm>
             <a:off x="6400800" y="1883520"/>
-            <a:ext cx="327960" cy="327960"/>
+            <a:ext cx="327600" cy="327600"/>
           </a:xfrm>
           <a:prstGeom prst="ellipse">
             <a:avLst/>
@@ -4525,7 +4525,7 @@
         <p:spPr>
           <a:xfrm>
             <a:off x="6400800" y="1883520"/>
-            <a:ext cx="327960" cy="327960"/>
+            <a:ext cx="327600" cy="327600"/>
           </a:xfrm>
           <a:prstGeom prst="rect">
             <a:avLst/>
@@ -4580,7 +4580,7 @@
         <p:spPr>
           <a:xfrm>
             <a:off x="6858000" y="1828800"/>
-            <a:ext cx="4570920" cy="730440"/>
+            <a:ext cx="4570560" cy="730080"/>
           </a:xfrm>
           <a:prstGeom prst="rect">
             <a:avLst/>
@@ -4635,7 +4635,7 @@
         <p:spPr>
           <a:xfrm>
             <a:off x="6400800" y="2871360"/>
-            <a:ext cx="327960" cy="327960"/>
+            <a:ext cx="327600" cy="327600"/>
           </a:xfrm>
           <a:prstGeom prst="ellipse">
             <a:avLst/>
@@ -4663,7 +4663,7 @@
         <p:spPr>
           <a:xfrm>
             <a:off x="6400800" y="2871360"/>
-            <a:ext cx="327960" cy="327960"/>
+            <a:ext cx="327600" cy="327600"/>
           </a:xfrm>
           <a:prstGeom prst="rect">
             <a:avLst/>
@@ -4718,7 +4718,7 @@
         <p:spPr>
           <a:xfrm>
             <a:off x="6858000" y="2816280"/>
-            <a:ext cx="4570920" cy="730440"/>
+            <a:ext cx="4570560" cy="730080"/>
           </a:xfrm>
           <a:prstGeom prst="rect">
             <a:avLst/>
@@ -4773,7 +4773,7 @@
         <p:spPr>
           <a:xfrm>
             <a:off x="6400800" y="3858840"/>
-            <a:ext cx="327960" cy="327960"/>
+            <a:ext cx="327600" cy="327600"/>
           </a:xfrm>
           <a:prstGeom prst="ellipse">
             <a:avLst/>
@@ -4801,7 +4801,7 @@
         <p:spPr>
           <a:xfrm>
             <a:off x="6400800" y="3858840"/>
-            <a:ext cx="327960" cy="327960"/>
+            <a:ext cx="327600" cy="327600"/>
           </a:xfrm>
           <a:prstGeom prst="rect">
             <a:avLst/>
@@ -4856,7 +4856,7 @@
         <p:spPr>
           <a:xfrm>
             <a:off x="6858000" y="3803760"/>
-            <a:ext cx="4570920" cy="730440"/>
+            <a:ext cx="4570560" cy="730080"/>
           </a:xfrm>
           <a:prstGeom prst="rect">
             <a:avLst/>
@@ -4911,7 +4911,7 @@
         <p:spPr>
           <a:xfrm>
             <a:off x="6400800" y="4846320"/>
-            <a:ext cx="327960" cy="327960"/>
+            <a:ext cx="327600" cy="327600"/>
           </a:xfrm>
           <a:prstGeom prst="ellipse">
             <a:avLst/>
@@ -4939,7 +4939,7 @@
         <p:spPr>
           <a:xfrm>
             <a:off x="6400800" y="4846320"/>
-            <a:ext cx="327960" cy="327960"/>
+            <a:ext cx="327600" cy="327600"/>
           </a:xfrm>
           <a:prstGeom prst="rect">
             <a:avLst/>
@@ -4994,7 +4994,7 @@
         <p:spPr>
           <a:xfrm>
             <a:off x="6858000" y="4791600"/>
-            <a:ext cx="4570920" cy="730440"/>
+            <a:ext cx="4570560" cy="730080"/>
           </a:xfrm>
           <a:prstGeom prst="rect">
             <a:avLst/>
@@ -5086,7 +5086,7 @@
         <p:spPr>
           <a:xfrm>
             <a:off x="685800" y="548640"/>
-            <a:ext cx="7314120" cy="547560"/>
+            <a:ext cx="7313760" cy="547200"/>
           </a:xfrm>
           <a:prstGeom prst="rect">
             <a:avLst/>
@@ -5141,7 +5141,7 @@
         <p:spPr>
           <a:xfrm>
             <a:off x="685800" y="1417320"/>
-            <a:ext cx="4845240" cy="273240"/>
+            <a:ext cx="4844880" cy="272880"/>
           </a:xfrm>
           <a:prstGeom prst="rect">
             <a:avLst/>
@@ -5172,7 +5172,7 @@
               </a:tabLst>
             </a:pPr>
             <a:r>
-              <a:rPr b="1" lang="en-US" sz="1100" spc="194" strike="noStrike">
+              <a:rPr b="1" lang="en-US" sz="1100" spc="191" strike="noStrike">
                 <a:solidFill>
                   <a:srgbClr val="1b9aaa"/>
                 </a:solidFill>
@@ -5196,7 +5196,7 @@
         <p:spPr>
           <a:xfrm>
             <a:off x="713160" y="1974960"/>
-            <a:ext cx="154440" cy="154440"/>
+            <a:ext cx="154080" cy="154080"/>
           </a:xfrm>
           <a:prstGeom prst="diamond">
             <a:avLst/>
@@ -5224,7 +5224,7 @@
         <p:spPr>
           <a:xfrm>
             <a:off x="1097280" y="1874520"/>
-            <a:ext cx="4479480" cy="383040"/>
+            <a:ext cx="4479120" cy="382680"/>
           </a:xfrm>
           <a:prstGeom prst="rect">
             <a:avLst/>
@@ -5279,7 +5279,7 @@
         <p:spPr>
           <a:xfrm>
             <a:off x="713160" y="2752200"/>
-            <a:ext cx="154440" cy="154440"/>
+            <a:ext cx="154080" cy="154080"/>
           </a:xfrm>
           <a:prstGeom prst="diamond">
             <a:avLst/>
@@ -5307,7 +5307,7 @@
         <p:spPr>
           <a:xfrm>
             <a:off x="1097280" y="2651760"/>
-            <a:ext cx="4479480" cy="383040"/>
+            <a:ext cx="4479120" cy="382680"/>
           </a:xfrm>
           <a:prstGeom prst="rect">
             <a:avLst/>
@@ -5362,7 +5362,7 @@
         <p:spPr>
           <a:xfrm>
             <a:off x="713160" y="3529440"/>
-            <a:ext cx="154440" cy="154440"/>
+            <a:ext cx="154080" cy="154080"/>
           </a:xfrm>
           <a:prstGeom prst="diamond">
             <a:avLst/>
@@ -5390,7 +5390,7 @@
         <p:spPr>
           <a:xfrm>
             <a:off x="1097280" y="3429000"/>
-            <a:ext cx="4479480" cy="383040"/>
+            <a:ext cx="4479120" cy="382680"/>
           </a:xfrm>
           <a:prstGeom prst="rect">
             <a:avLst/>
@@ -5445,7 +5445,7 @@
         <p:spPr>
           <a:xfrm>
             <a:off x="713160" y="4306680"/>
-            <a:ext cx="154440" cy="154440"/>
+            <a:ext cx="154080" cy="154080"/>
           </a:xfrm>
           <a:prstGeom prst="diamond">
             <a:avLst/>
@@ -5473,7 +5473,7 @@
         <p:spPr>
           <a:xfrm>
             <a:off x="1097280" y="4206240"/>
-            <a:ext cx="4479480" cy="383040"/>
+            <a:ext cx="4479120" cy="382680"/>
           </a:xfrm>
           <a:prstGeom prst="rect">
             <a:avLst/>
@@ -5528,7 +5528,7 @@
         <p:spPr>
           <a:xfrm>
             <a:off x="1097280" y="4983480"/>
-            <a:ext cx="4479480" cy="383040"/>
+            <a:ext cx="4479120" cy="382680"/>
           </a:xfrm>
           <a:prstGeom prst="rect">
             <a:avLst/>
@@ -5583,7 +5583,7 @@
         <p:spPr>
           <a:xfrm>
             <a:off x="6217920" y="1371600"/>
-            <a:ext cx="5256720" cy="4159440"/>
+            <a:ext cx="5256360" cy="4159080"/>
           </a:xfrm>
           <a:prstGeom prst="roundRect">
             <a:avLst>
@@ -5613,7 +5613,7 @@
         <p:spPr>
           <a:xfrm>
             <a:off x="6537960" y="1691640"/>
-            <a:ext cx="4662360" cy="273240"/>
+            <a:ext cx="4662000" cy="272880"/>
           </a:xfrm>
           <a:prstGeom prst="rect">
             <a:avLst/>
@@ -5644,7 +5644,7 @@
               </a:tabLst>
             </a:pPr>
             <a:r>
-              <a:rPr b="1" lang="en-US" sz="1050" spc="194" strike="noStrike">
+              <a:rPr b="1" lang="en-US" sz="1050" spc="191" strike="noStrike">
                 <a:solidFill>
                   <a:srgbClr val="f4a259"/>
                 </a:solidFill>
@@ -5668,7 +5668,7 @@
         <p:spPr>
           <a:xfrm>
             <a:off x="6537960" y="2030040"/>
-            <a:ext cx="4616640" cy="867600"/>
+            <a:ext cx="4616280" cy="867240"/>
           </a:xfrm>
           <a:prstGeom prst="rect">
             <a:avLst/>
@@ -5723,7 +5723,7 @@
         <p:spPr>
           <a:xfrm>
             <a:off x="6537960" y="2971800"/>
-            <a:ext cx="4616640" cy="456120"/>
+            <a:ext cx="4616280" cy="455760"/>
           </a:xfrm>
           <a:prstGeom prst="rect">
             <a:avLst/>
@@ -5778,7 +5778,7 @@
         <p:spPr>
           <a:xfrm>
             <a:off x="6537960" y="3639240"/>
-            <a:ext cx="1050480" cy="410400"/>
+            <a:ext cx="1050120" cy="410040"/>
           </a:xfrm>
           <a:prstGeom prst="roundRect">
             <a:avLst>
@@ -5808,7 +5808,7 @@
         <p:spPr>
           <a:xfrm>
             <a:off x="6537960" y="3639240"/>
-            <a:ext cx="1050480" cy="410400"/>
+            <a:ext cx="1050120" cy="410040"/>
           </a:xfrm>
           <a:prstGeom prst="rect">
             <a:avLst/>
@@ -5863,7 +5863,7 @@
         <p:spPr>
           <a:xfrm>
             <a:off x="7754040" y="3639240"/>
-            <a:ext cx="1233360" cy="410400"/>
+            <a:ext cx="1233000" cy="410040"/>
           </a:xfrm>
           <a:prstGeom prst="roundRect">
             <a:avLst>
@@ -5893,7 +5893,7 @@
         <p:spPr>
           <a:xfrm>
             <a:off x="7754040" y="3639240"/>
-            <a:ext cx="1233360" cy="410400"/>
+            <a:ext cx="1233000" cy="410040"/>
           </a:xfrm>
           <a:prstGeom prst="rect">
             <a:avLst/>
@@ -5948,7 +5948,7 @@
         <p:spPr>
           <a:xfrm>
             <a:off x="9153000" y="3639240"/>
-            <a:ext cx="1644840" cy="410400"/>
+            <a:ext cx="1644480" cy="410040"/>
           </a:xfrm>
           <a:prstGeom prst="roundRect">
             <a:avLst>
@@ -5978,7 +5978,7 @@
         <p:spPr>
           <a:xfrm>
             <a:off x="9153000" y="3639240"/>
-            <a:ext cx="1644840" cy="410400"/>
+            <a:ext cx="1644480" cy="410040"/>
           </a:xfrm>
           <a:prstGeom prst="rect">
             <a:avLst/>
@@ -6033,7 +6033,7 @@
         <p:spPr>
           <a:xfrm>
             <a:off x="6537960" y="4206240"/>
-            <a:ext cx="1599120" cy="410400"/>
+            <a:ext cx="1598760" cy="410040"/>
           </a:xfrm>
           <a:prstGeom prst="roundRect">
             <a:avLst>
@@ -6063,7 +6063,7 @@
         <p:spPr>
           <a:xfrm>
             <a:off x="6537960" y="4206240"/>
-            <a:ext cx="1599120" cy="410400"/>
+            <a:ext cx="1598760" cy="410040"/>
           </a:xfrm>
           <a:prstGeom prst="rect">
             <a:avLst/>
@@ -6118,7 +6118,7 @@
         <p:spPr>
           <a:xfrm>
             <a:off x="8302680" y="4206240"/>
-            <a:ext cx="2147760" cy="410400"/>
+            <a:ext cx="2147400" cy="410040"/>
           </a:xfrm>
           <a:prstGeom prst="roundRect">
             <a:avLst>
@@ -6148,7 +6148,7 @@
         <p:spPr>
           <a:xfrm>
             <a:off x="8302680" y="4206240"/>
-            <a:ext cx="2147760" cy="410400"/>
+            <a:ext cx="2147400" cy="410040"/>
           </a:xfrm>
           <a:prstGeom prst="rect">
             <a:avLst/>
@@ -6203,7 +6203,7 @@
         <p:spPr>
           <a:xfrm>
             <a:off x="10607040" y="4800600"/>
-            <a:ext cx="547560" cy="547560"/>
+            <a:ext cx="547200" cy="547200"/>
           </a:xfrm>
           <a:prstGeom prst="ellipse">
             <a:avLst/>
@@ -6235,7 +6235,7 @@
         <p:spPr>
           <a:xfrm>
             <a:off x="10755000" y="4948560"/>
-            <a:ext cx="251280" cy="251280"/>
+            <a:ext cx="250920" cy="250920"/>
           </a:xfrm>
           <a:prstGeom prst="rect">
             <a:avLst/>
@@ -6291,7 +6291,7 @@
         <p:spPr>
           <a:xfrm>
             <a:off x="685800" y="457200"/>
-            <a:ext cx="7314120" cy="547560"/>
+            <a:ext cx="7313760" cy="547200"/>
           </a:xfrm>
           <a:prstGeom prst="rect">
             <a:avLst/>
@@ -6346,7 +6346,7 @@
         <p:spPr>
           <a:xfrm>
             <a:off x="685800" y="1234440"/>
-            <a:ext cx="5119560" cy="3427920"/>
+            <a:ext cx="5119200" cy="3427560"/>
           </a:xfrm>
           <a:prstGeom prst="roundRect">
             <a:avLst>
@@ -6376,7 +6376,7 @@
         <p:spPr>
           <a:xfrm>
             <a:off x="1005840" y="1536120"/>
-            <a:ext cx="419400" cy="419400"/>
+            <a:ext cx="419040" cy="419040"/>
           </a:xfrm>
           <a:prstGeom prst="ellipse">
             <a:avLst/>
@@ -6408,7 +6408,7 @@
         <p:spPr>
           <a:xfrm>
             <a:off x="1119240" y="1649880"/>
-            <a:ext cx="192240" cy="192240"/>
+            <a:ext cx="191880" cy="191880"/>
           </a:xfrm>
           <a:prstGeom prst="rect">
             <a:avLst/>
@@ -6427,7 +6427,7 @@
         <p:spPr>
           <a:xfrm>
             <a:off x="1554480" y="1536120"/>
-            <a:ext cx="3930840" cy="419400"/>
+            <a:ext cx="3930480" cy="419040"/>
           </a:xfrm>
           <a:prstGeom prst="rect">
             <a:avLst/>
@@ -6482,7 +6482,7 @@
         <p:spPr>
           <a:xfrm>
             <a:off x="1069920" y="2354760"/>
-            <a:ext cx="99360" cy="99360"/>
+            <a:ext cx="99000" cy="99000"/>
           </a:xfrm>
           <a:prstGeom prst="ellipse">
             <a:avLst/>
@@ -6510,7 +6510,7 @@
         <p:spPr>
           <a:xfrm>
             <a:off x="1344240" y="2212920"/>
-            <a:ext cx="4113720" cy="383040"/>
+            <a:ext cx="4113360" cy="382680"/>
           </a:xfrm>
           <a:prstGeom prst="rect">
             <a:avLst/>
@@ -6565,7 +6565,7 @@
         <p:spPr>
           <a:xfrm>
             <a:off x="1069920" y="2811960"/>
-            <a:ext cx="99360" cy="99360"/>
+            <a:ext cx="99000" cy="99000"/>
           </a:xfrm>
           <a:prstGeom prst="ellipse">
             <a:avLst/>
@@ -6593,7 +6593,7 @@
         <p:spPr>
           <a:xfrm>
             <a:off x="1344240" y="2670120"/>
-            <a:ext cx="4113720" cy="383040"/>
+            <a:ext cx="4113360" cy="382680"/>
           </a:xfrm>
           <a:prstGeom prst="rect">
             <a:avLst/>
@@ -6648,7 +6648,7 @@
         <p:spPr>
           <a:xfrm>
             <a:off x="1069920" y="3269160"/>
-            <a:ext cx="99360" cy="99360"/>
+            <a:ext cx="99000" cy="99000"/>
           </a:xfrm>
           <a:prstGeom prst="ellipse">
             <a:avLst/>
@@ -6676,7 +6676,7 @@
         <p:spPr>
           <a:xfrm>
             <a:off x="1344240" y="3127320"/>
-            <a:ext cx="4113720" cy="383040"/>
+            <a:ext cx="4113360" cy="382680"/>
           </a:xfrm>
           <a:prstGeom prst="rect">
             <a:avLst/>
@@ -6731,7 +6731,7 @@
         <p:spPr>
           <a:xfrm>
             <a:off x="6355080" y="1234440"/>
-            <a:ext cx="5119560" cy="3427920"/>
+            <a:ext cx="5119200" cy="3427560"/>
           </a:xfrm>
           <a:prstGeom prst="roundRect">
             <a:avLst>
@@ -6761,7 +6761,7 @@
         <p:spPr>
           <a:xfrm>
             <a:off x="6675120" y="1536120"/>
-            <a:ext cx="419400" cy="419400"/>
+            <a:ext cx="419040" cy="419040"/>
           </a:xfrm>
           <a:prstGeom prst="ellipse">
             <a:avLst/>
@@ -6793,7 +6793,7 @@
         <p:spPr>
           <a:xfrm>
             <a:off x="6788520" y="1649880"/>
-            <a:ext cx="192240" cy="192240"/>
+            <a:ext cx="191880" cy="191880"/>
           </a:xfrm>
           <a:prstGeom prst="rect">
             <a:avLst/>
@@ -6812,7 +6812,7 @@
         <p:spPr>
           <a:xfrm>
             <a:off x="7223760" y="1536120"/>
-            <a:ext cx="3930840" cy="419400"/>
+            <a:ext cx="3930480" cy="419040"/>
           </a:xfrm>
           <a:prstGeom prst="rect">
             <a:avLst/>
@@ -6867,7 +6867,7 @@
         <p:spPr>
           <a:xfrm>
             <a:off x="6739200" y="2354760"/>
-            <a:ext cx="99360" cy="99360"/>
+            <a:ext cx="99000" cy="99000"/>
           </a:xfrm>
           <a:prstGeom prst="ellipse">
             <a:avLst/>
@@ -6895,7 +6895,7 @@
         <p:spPr>
           <a:xfrm>
             <a:off x="7013520" y="2212920"/>
-            <a:ext cx="4113720" cy="383040"/>
+            <a:ext cx="4113360" cy="382680"/>
           </a:xfrm>
           <a:prstGeom prst="rect">
             <a:avLst/>
@@ -6950,7 +6950,7 @@
         <p:spPr>
           <a:xfrm>
             <a:off x="6739200" y="2811960"/>
-            <a:ext cx="99360" cy="99360"/>
+            <a:ext cx="99000" cy="99000"/>
           </a:xfrm>
           <a:prstGeom prst="ellipse">
             <a:avLst/>
@@ -6978,7 +6978,7 @@
         <p:spPr>
           <a:xfrm>
             <a:off x="7013520" y="2670120"/>
-            <a:ext cx="4113720" cy="383040"/>
+            <a:ext cx="4113360" cy="382680"/>
           </a:xfrm>
           <a:prstGeom prst="rect">
             <a:avLst/>
@@ -7033,7 +7033,7 @@
         <p:spPr>
           <a:xfrm>
             <a:off x="6739200" y="3269160"/>
-            <a:ext cx="99360" cy="99360"/>
+            <a:ext cx="99000" cy="99000"/>
           </a:xfrm>
           <a:prstGeom prst="ellipse">
             <a:avLst/>
@@ -7061,7 +7061,7 @@
         <p:spPr>
           <a:xfrm>
             <a:off x="7013520" y="3127320"/>
-            <a:ext cx="4113720" cy="383040"/>
+            <a:ext cx="4113360" cy="382680"/>
           </a:xfrm>
           <a:prstGeom prst="rect">
             <a:avLst/>
@@ -7116,7 +7116,7 @@
         <p:spPr>
           <a:xfrm>
             <a:off x="6739200" y="3726360"/>
-            <a:ext cx="99360" cy="99360"/>
+            <a:ext cx="99000" cy="99000"/>
           </a:xfrm>
           <a:prstGeom prst="ellipse">
             <a:avLst/>
@@ -7144,7 +7144,7 @@
         <p:spPr>
           <a:xfrm>
             <a:off x="7013520" y="3584520"/>
-            <a:ext cx="4113720" cy="383040"/>
+            <a:ext cx="4113360" cy="382680"/>
           </a:xfrm>
           <a:prstGeom prst="rect">
             <a:avLst/>
@@ -7199,7 +7199,7 @@
         <p:spPr>
           <a:xfrm>
             <a:off x="6739200" y="4183560"/>
-            <a:ext cx="99360" cy="99360"/>
+            <a:ext cx="99000" cy="99000"/>
           </a:xfrm>
           <a:prstGeom prst="ellipse">
             <a:avLst/>
@@ -7227,7 +7227,7 @@
         <p:spPr>
           <a:xfrm>
             <a:off x="7013520" y="4041720"/>
-            <a:ext cx="4113720" cy="383040"/>
+            <a:ext cx="4113360" cy="382680"/>
           </a:xfrm>
           <a:prstGeom prst="rect">
             <a:avLst/>
@@ -7282,7 +7282,7 @@
         <p:spPr>
           <a:xfrm>
             <a:off x="685800" y="5029200"/>
-            <a:ext cx="10788840" cy="1050480"/>
+            <a:ext cx="10788480" cy="1050120"/>
           </a:xfrm>
           <a:prstGeom prst="roundRect">
             <a:avLst>
@@ -7312,7 +7312,7 @@
         <p:spPr>
           <a:xfrm>
             <a:off x="1051560" y="5193720"/>
-            <a:ext cx="3656520" cy="254880"/>
+            <a:ext cx="3656160" cy="254520"/>
           </a:xfrm>
           <a:prstGeom prst="rect">
             <a:avLst/>
@@ -7343,7 +7343,7 @@
               </a:tabLst>
             </a:pPr>
             <a:r>
-              <a:rPr b="1" lang="en-US" sz="1050" spc="194" strike="noStrike">
+              <a:rPr b="1" lang="en-US" sz="1050" spc="191" strike="noStrike">
                 <a:solidFill>
                   <a:srgbClr val="f4a259"/>
                 </a:solidFill>
@@ -7367,7 +7367,7 @@
         <p:spPr>
           <a:xfrm>
             <a:off x="1051560" y="5449680"/>
-            <a:ext cx="9965880" cy="410400"/>
+            <a:ext cx="9965520" cy="410040"/>
           </a:xfrm>
           <a:prstGeom prst="rect">
             <a:avLst/>
@@ -7459,7 +7459,7 @@
         <p:spPr>
           <a:xfrm>
             <a:off x="685800" y="411480"/>
-            <a:ext cx="7314120" cy="547560"/>
+            <a:ext cx="7313760" cy="547200"/>
           </a:xfrm>
           <a:prstGeom prst="rect">
             <a:avLst/>
@@ -7514,7 +7514,7 @@
         <p:spPr>
           <a:xfrm>
             <a:off x="685800" y="1207080"/>
-            <a:ext cx="2010600" cy="547560"/>
+            <a:ext cx="2010240" cy="547200"/>
           </a:xfrm>
           <a:prstGeom prst="roundRect">
             <a:avLst>
@@ -7544,7 +7544,7 @@
         <p:spPr>
           <a:xfrm>
             <a:off x="685800" y="1207080"/>
-            <a:ext cx="2010600" cy="547560"/>
+            <a:ext cx="2010240" cy="547200"/>
           </a:xfrm>
           <a:prstGeom prst="rect">
             <a:avLst/>
@@ -7599,7 +7599,7 @@
         <p:spPr>
           <a:xfrm>
             <a:off x="2697480" y="1207080"/>
-            <a:ext cx="254880" cy="547560"/>
+            <a:ext cx="254520" cy="547200"/>
           </a:xfrm>
           <a:prstGeom prst="rect">
             <a:avLst/>
@@ -7654,7 +7654,7 @@
         <p:spPr>
           <a:xfrm>
             <a:off x="2953440" y="1207080"/>
-            <a:ext cx="2010600" cy="547560"/>
+            <a:ext cx="2010240" cy="547200"/>
           </a:xfrm>
           <a:prstGeom prst="roundRect">
             <a:avLst>
@@ -7684,7 +7684,7 @@
         <p:spPr>
           <a:xfrm>
             <a:off x="2953440" y="1207080"/>
-            <a:ext cx="2010600" cy="547560"/>
+            <a:ext cx="2010240" cy="547200"/>
           </a:xfrm>
           <a:prstGeom prst="rect">
             <a:avLst/>
@@ -7739,7 +7739,7 @@
         <p:spPr>
           <a:xfrm>
             <a:off x="4965120" y="1207080"/>
-            <a:ext cx="254880" cy="547560"/>
+            <a:ext cx="254520" cy="547200"/>
           </a:xfrm>
           <a:prstGeom prst="rect">
             <a:avLst/>
@@ -7794,7 +7794,7 @@
         <p:spPr>
           <a:xfrm>
             <a:off x="5221080" y="1207080"/>
-            <a:ext cx="2010600" cy="547560"/>
+            <a:ext cx="2010240" cy="547200"/>
           </a:xfrm>
           <a:prstGeom prst="roundRect">
             <a:avLst>
@@ -7824,7 +7824,7 @@
         <p:spPr>
           <a:xfrm>
             <a:off x="5221080" y="1207080"/>
-            <a:ext cx="2010600" cy="547560"/>
+            <a:ext cx="2010240" cy="547200"/>
           </a:xfrm>
           <a:prstGeom prst="rect">
             <a:avLst/>
@@ -7879,7 +7879,7 @@
         <p:spPr>
           <a:xfrm>
             <a:off x="7232760" y="1207080"/>
-            <a:ext cx="254880" cy="547560"/>
+            <a:ext cx="254520" cy="547200"/>
           </a:xfrm>
           <a:prstGeom prst="rect">
             <a:avLst/>
@@ -7934,7 +7934,7 @@
         <p:spPr>
           <a:xfrm>
             <a:off x="7489080" y="1207080"/>
-            <a:ext cx="2010600" cy="547560"/>
+            <a:ext cx="2010240" cy="547200"/>
           </a:xfrm>
           <a:prstGeom prst="roundRect">
             <a:avLst>
@@ -7964,7 +7964,7 @@
         <p:spPr>
           <a:xfrm>
             <a:off x="7489080" y="1207080"/>
-            <a:ext cx="2010600" cy="547560"/>
+            <a:ext cx="2010240" cy="547200"/>
           </a:xfrm>
           <a:prstGeom prst="rect">
             <a:avLst/>
@@ -8019,7 +8019,7 @@
         <p:spPr>
           <a:xfrm>
             <a:off x="9500760" y="1207080"/>
-            <a:ext cx="254880" cy="547560"/>
+            <a:ext cx="254520" cy="547200"/>
           </a:xfrm>
           <a:prstGeom prst="rect">
             <a:avLst/>
@@ -8074,7 +8074,7 @@
         <p:spPr>
           <a:xfrm>
             <a:off x="9756720" y="1207080"/>
-            <a:ext cx="2010600" cy="547560"/>
+            <a:ext cx="2010240" cy="547200"/>
           </a:xfrm>
           <a:prstGeom prst="roundRect">
             <a:avLst>
@@ -8104,7 +8104,7 @@
         <p:spPr>
           <a:xfrm>
             <a:off x="9756720" y="1207080"/>
-            <a:ext cx="2010600" cy="547560"/>
+            <a:ext cx="2010240" cy="547200"/>
           </a:xfrm>
           <a:prstGeom prst="rect">
             <a:avLst/>
@@ -8159,7 +8159,7 @@
         <p:spPr>
           <a:xfrm>
             <a:off x="685800" y="2148840"/>
-            <a:ext cx="3501000" cy="959040"/>
+            <a:ext cx="3500640" cy="958680"/>
           </a:xfrm>
           <a:prstGeom prst="roundRect">
             <a:avLst>
@@ -8189,7 +8189,7 @@
         <p:spPr>
           <a:xfrm>
             <a:off x="941760" y="2423160"/>
-            <a:ext cx="410400" cy="410400"/>
+            <a:ext cx="410040" cy="410040"/>
           </a:xfrm>
           <a:prstGeom prst="ellipse">
             <a:avLst/>
@@ -8221,7 +8221,7 @@
         <p:spPr>
           <a:xfrm>
             <a:off x="1053000" y="2534400"/>
-            <a:ext cx="188280" cy="188280"/>
+            <a:ext cx="187920" cy="187920"/>
           </a:xfrm>
           <a:prstGeom prst="rect">
             <a:avLst/>
@@ -8240,7 +8240,7 @@
         <p:spPr>
           <a:xfrm>
             <a:off x="1490400" y="2240280"/>
-            <a:ext cx="2495160" cy="776160"/>
+            <a:ext cx="2494800" cy="775800"/>
           </a:xfrm>
           <a:prstGeom prst="rect">
             <a:avLst/>
@@ -8295,7 +8295,7 @@
         <p:spPr>
           <a:xfrm>
             <a:off x="4489560" y="2148840"/>
-            <a:ext cx="3501000" cy="959040"/>
+            <a:ext cx="3500640" cy="958680"/>
           </a:xfrm>
           <a:prstGeom prst="roundRect">
             <a:avLst>
@@ -8325,7 +8325,7 @@
         <p:spPr>
           <a:xfrm>
             <a:off x="4745880" y="2423160"/>
-            <a:ext cx="410400" cy="410400"/>
+            <a:ext cx="410040" cy="410040"/>
           </a:xfrm>
           <a:prstGeom prst="ellipse">
             <a:avLst/>
@@ -8357,7 +8357,7 @@
         <p:spPr>
           <a:xfrm>
             <a:off x="4856760" y="2534400"/>
-            <a:ext cx="188280" cy="188280"/>
+            <a:ext cx="187920" cy="187920"/>
           </a:xfrm>
           <a:prstGeom prst="rect">
             <a:avLst/>
@@ -8376,7 +8376,7 @@
         <p:spPr>
           <a:xfrm>
             <a:off x="5294520" y="2240280"/>
-            <a:ext cx="2495160" cy="776160"/>
+            <a:ext cx="2494800" cy="775800"/>
           </a:xfrm>
           <a:prstGeom prst="rect">
             <a:avLst/>
@@ -8431,7 +8431,7 @@
         <p:spPr>
           <a:xfrm>
             <a:off x="8293680" y="2148840"/>
-            <a:ext cx="3501000" cy="959040"/>
+            <a:ext cx="3500640" cy="958680"/>
           </a:xfrm>
           <a:prstGeom prst="roundRect">
             <a:avLst>
@@ -8461,7 +8461,7 @@
         <p:spPr>
           <a:xfrm>
             <a:off x="8549640" y="2423160"/>
-            <a:ext cx="410400" cy="410400"/>
+            <a:ext cx="410040" cy="410040"/>
           </a:xfrm>
           <a:prstGeom prst="ellipse">
             <a:avLst/>
@@ -8493,7 +8493,7 @@
         <p:spPr>
           <a:xfrm>
             <a:off x="8660880" y="2534400"/>
-            <a:ext cx="188280" cy="188280"/>
+            <a:ext cx="187920" cy="187920"/>
           </a:xfrm>
           <a:prstGeom prst="rect">
             <a:avLst/>
@@ -8512,7 +8512,7 @@
         <p:spPr>
           <a:xfrm>
             <a:off x="9098280" y="2240280"/>
-            <a:ext cx="2495160" cy="776160"/>
+            <a:ext cx="2494800" cy="775800"/>
           </a:xfrm>
           <a:prstGeom prst="rect">
             <a:avLst/>
@@ -8567,7 +8567,7 @@
         <p:spPr>
           <a:xfrm>
             <a:off x="685800" y="3291840"/>
-            <a:ext cx="3501000" cy="959040"/>
+            <a:ext cx="3500640" cy="958680"/>
           </a:xfrm>
           <a:prstGeom prst="roundRect">
             <a:avLst>
@@ -8597,7 +8597,7 @@
         <p:spPr>
           <a:xfrm>
             <a:off x="941760" y="3566160"/>
-            <a:ext cx="410400" cy="410400"/>
+            <a:ext cx="410040" cy="410040"/>
           </a:xfrm>
           <a:prstGeom prst="ellipse">
             <a:avLst/>
@@ -8629,7 +8629,7 @@
         <p:spPr>
           <a:xfrm>
             <a:off x="1053000" y="3677400"/>
-            <a:ext cx="188280" cy="188280"/>
+            <a:ext cx="187920" cy="187920"/>
           </a:xfrm>
           <a:prstGeom prst="rect">
             <a:avLst/>
@@ -8648,7 +8648,7 @@
         <p:spPr>
           <a:xfrm>
             <a:off x="1490400" y="3383280"/>
-            <a:ext cx="2495160" cy="776160"/>
+            <a:ext cx="2494800" cy="775800"/>
           </a:xfrm>
           <a:prstGeom prst="rect">
             <a:avLst/>
@@ -8703,7 +8703,7 @@
         <p:spPr>
           <a:xfrm>
             <a:off x="4489560" y="3291840"/>
-            <a:ext cx="3501000" cy="959040"/>
+            <a:ext cx="3500640" cy="958680"/>
           </a:xfrm>
           <a:prstGeom prst="roundRect">
             <a:avLst>
@@ -8733,7 +8733,7 @@
         <p:spPr>
           <a:xfrm>
             <a:off x="4745880" y="3566160"/>
-            <a:ext cx="410400" cy="410400"/>
+            <a:ext cx="410040" cy="410040"/>
           </a:xfrm>
           <a:prstGeom prst="ellipse">
             <a:avLst/>
@@ -8765,7 +8765,7 @@
         <p:spPr>
           <a:xfrm>
             <a:off x="4856760" y="3677400"/>
-            <a:ext cx="188280" cy="188280"/>
+            <a:ext cx="187920" cy="187920"/>
           </a:xfrm>
           <a:prstGeom prst="rect">
             <a:avLst/>
@@ -8784,7 +8784,7 @@
         <p:spPr>
           <a:xfrm>
             <a:off x="5294520" y="3383280"/>
-            <a:ext cx="2495160" cy="776160"/>
+            <a:ext cx="2494800" cy="775800"/>
           </a:xfrm>
           <a:prstGeom prst="rect">
             <a:avLst/>
@@ -8839,7 +8839,7 @@
         <p:spPr>
           <a:xfrm>
             <a:off x="8293680" y="3291840"/>
-            <a:ext cx="3501000" cy="959040"/>
+            <a:ext cx="3500640" cy="958680"/>
           </a:xfrm>
           <a:prstGeom prst="roundRect">
             <a:avLst>
@@ -8869,7 +8869,7 @@
         <p:spPr>
           <a:xfrm>
             <a:off x="8549640" y="3566160"/>
-            <a:ext cx="410400" cy="410400"/>
+            <a:ext cx="410040" cy="410040"/>
           </a:xfrm>
           <a:prstGeom prst="ellipse">
             <a:avLst/>
@@ -8901,7 +8901,7 @@
         <p:spPr>
           <a:xfrm>
             <a:off x="8660880" y="3677400"/>
-            <a:ext cx="188280" cy="188280"/>
+            <a:ext cx="187920" cy="187920"/>
           </a:xfrm>
           <a:prstGeom prst="rect">
             <a:avLst/>
@@ -8920,7 +8920,7 @@
         <p:spPr>
           <a:xfrm>
             <a:off x="9098280" y="3383280"/>
-            <a:ext cx="2495160" cy="776160"/>
+            <a:ext cx="2494800" cy="775800"/>
           </a:xfrm>
           <a:prstGeom prst="rect">
             <a:avLst/>
@@ -9003,7 +9003,7 @@
         <p:spPr>
           <a:xfrm>
             <a:off x="685800" y="4846320"/>
-            <a:ext cx="3656520" cy="254880"/>
+            <a:ext cx="3656160" cy="254520"/>
           </a:xfrm>
           <a:prstGeom prst="rect">
             <a:avLst/>
@@ -9034,7 +9034,7 @@
               </a:tabLst>
             </a:pPr>
             <a:r>
-              <a:rPr b="1" lang="en-US" sz="1050" spc="194" strike="noStrike">
+              <a:rPr b="1" lang="en-US" sz="1050" spc="191" strike="noStrike">
                 <a:solidFill>
                   <a:srgbClr val="f4a259"/>
                 </a:solidFill>
@@ -9058,7 +9058,7 @@
         <p:spPr>
           <a:xfrm>
             <a:off x="685800" y="5120640"/>
-            <a:ext cx="10788840" cy="346320"/>
+            <a:ext cx="10788480" cy="345960"/>
           </a:xfrm>
           <a:prstGeom prst="rect">
             <a:avLst/>
@@ -9113,7 +9113,7 @@
         <p:spPr>
           <a:xfrm>
             <a:off x="685800" y="5577840"/>
-            <a:ext cx="10788840" cy="684720"/>
+            <a:ext cx="10788480" cy="684360"/>
           </a:xfrm>
           <a:prstGeom prst="rect">
             <a:avLst/>
@@ -9164,9 +9164,6 @@
               <a:t>My aim is to integrate teaching, research and practical robotics experience to develop capable students and contribute to reliable autonomous robotic systems.”</a:t>
             </a:r>
             <a:endParaRPr b="0" lang="en-US" sz="1600" spc="-1" strike="noStrike">
-              <a:solidFill>
-                <a:srgbClr val="ffffd7"/>
-              </a:solidFill>
               <a:latin typeface="Arial"/>
             </a:endParaRPr>
           </a:p>
@@ -9211,7 +9208,7 @@
         <p:spPr>
           <a:xfrm>
             <a:off x="228600" y="183960"/>
-            <a:ext cx="11429640" cy="6272280"/>
+            <a:ext cx="11429280" cy="6271920"/>
           </a:xfrm>
           <a:prstGeom prst="rect">
             <a:avLst/>
@@ -9246,7 +9243,11 @@
             </a:pPr>
             <a:r>
               <a:rPr b="1" lang="en-US" sz="2200" spc="-1" strike="noStrike">
+                <a:solidFill>
+                  <a:srgbClr val="000000"/>
+                </a:solidFill>
                 <a:latin typeface="Arial"/>
+                <a:ea typeface="DejaVu Sans"/>
               </a:rPr>
               <a:t>Journal Publications</a:t>
             </a:r>
@@ -9290,19 +9291,31 @@
             </a:pPr>
             <a:r>
               <a:rPr b="0" lang="en-US" sz="1800" spc="-1" strike="noStrike">
+                <a:solidFill>
+                  <a:srgbClr val="000000"/>
+                </a:solidFill>
                 <a:latin typeface="Arial"/>
+                <a:ea typeface="DejaVu Sans"/>
               </a:rPr>
               <a:t>Sharma, Monex, and Hari Kumar Voruganti. "</a:t>
             </a:r>
             <a:r>
               <a:rPr b="1" lang="en-US" sz="1800" spc="-1" strike="noStrike">
+                <a:solidFill>
+                  <a:srgbClr val="000000"/>
+                </a:solidFill>
                 <a:latin typeface="Arial"/>
+                <a:ea typeface="DejaVu Sans"/>
               </a:rPr>
               <a:t>Multi-objective optimization approach for coverage path planning of mobile robot.</a:t>
             </a:r>
             <a:r>
               <a:rPr b="0" lang="en-US" sz="1800" spc="-1" strike="noStrike">
+                <a:solidFill>
+                  <a:srgbClr val="000000"/>
+                </a:solidFill>
                 <a:latin typeface="Arial"/>
+                <a:ea typeface="DejaVu Sans"/>
               </a:rPr>
               <a:t>" </a:t>
             </a:r>
@@ -9312,12 +9325,17 @@
                   <a:srgbClr val="ff0000"/>
                 </a:solidFill>
                 <a:latin typeface="Arial"/>
+                <a:ea typeface="DejaVu Sans"/>
               </a:rPr>
               <a:t>Robotica (2024)</a:t>
             </a:r>
             <a:r>
               <a:rPr b="0" lang="en-US" sz="1800" spc="-1" strike="noStrike">
+                <a:solidFill>
+                  <a:srgbClr val="000000"/>
+                </a:solidFill>
                 <a:latin typeface="Arial"/>
+                <a:ea typeface="DejaVu Sans"/>
               </a:rPr>
               <a:t>: 1-25. SCIE, IF – 2.7, Q2.</a:t>
             </a:r>
@@ -9361,19 +9379,31 @@
             </a:pPr>
             <a:r>
               <a:rPr b="0" lang="en-US" sz="1800" spc="-1" strike="noStrike">
+                <a:solidFill>
+                  <a:srgbClr val="000000"/>
+                </a:solidFill>
                 <a:latin typeface="Arial"/>
+                <a:ea typeface="DejaVu Sans"/>
               </a:rPr>
               <a:t>Sharma, Monex, and Hari Kumar Voruganti. "</a:t>
             </a:r>
             <a:r>
               <a:rPr b="1" lang="en-US" sz="1800" spc="-1" strike="noStrike">
+                <a:solidFill>
+                  <a:srgbClr val="000000"/>
+                </a:solidFill>
                 <a:latin typeface="Arial"/>
+                <a:ea typeface="DejaVu Sans"/>
               </a:rPr>
               <a:t>Energy-Efficient Coverage Path Planning for Mobile Robots on Uneven Terrain via the TA-NSGA-II Approach.</a:t>
             </a:r>
             <a:r>
               <a:rPr b="0" lang="en-US" sz="1800" spc="-1" strike="noStrike">
+                <a:solidFill>
+                  <a:srgbClr val="000000"/>
+                </a:solidFill>
                 <a:latin typeface="Arial"/>
+                <a:ea typeface="DejaVu Sans"/>
               </a:rPr>
               <a:t>" </a:t>
             </a:r>
@@ -9383,6 +9413,7 @@
                   <a:srgbClr val="ff0000"/>
                 </a:solidFill>
                 <a:latin typeface="Arial"/>
+                <a:ea typeface="DejaVu Sans"/>
               </a:rPr>
               <a:t>Arabian Journal of Science and Engineering (2025)</a:t>
             </a:r>
@@ -9392,14 +9423,9 @@
                   <a:srgbClr val="000000"/>
                 </a:solidFill>
                 <a:latin typeface="Arial"/>
-              </a:rPr>
-              <a:t>:</a:t>
-            </a:r>
-            <a:r>
-              <a:rPr b="0" lang="en-US" sz="1800" spc="-1" strike="noStrike">
-                <a:latin typeface="Arial"/>
-              </a:rPr>
-              <a:t> 1-23. SCIE, IF – 2.9, Q1.</a:t>
+                <a:ea typeface="DejaVu Sans"/>
+              </a:rPr>
+              <a:t>: 1-23. SCIE, IF – 2.9, Q1.</a:t>
             </a:r>
             <a:endParaRPr b="0" lang="en-US" sz="1800" spc="-1" strike="noStrike">
               <a:latin typeface="Arial"/>
@@ -9441,19 +9467,31 @@
             </a:pPr>
             <a:r>
               <a:rPr b="0" lang="en-US" sz="1800" spc="-1" strike="noStrike">
+                <a:solidFill>
+                  <a:srgbClr val="000000"/>
+                </a:solidFill>
                 <a:latin typeface="Arial"/>
+                <a:ea typeface="DejaVu Sans"/>
               </a:rPr>
               <a:t>Sharma, Monex, and Hari Kumar Voruganti. "</a:t>
             </a:r>
             <a:r>
               <a:rPr b="1" lang="en-US" sz="1800" spc="-1" strike="noStrike">
+                <a:solidFill>
+                  <a:srgbClr val="000000"/>
+                </a:solidFill>
                 <a:latin typeface="Arial"/>
+                <a:ea typeface="DejaVu Sans"/>
               </a:rPr>
               <a:t>Implementation of Coverage Path Planning Based on Modified NSGA-II and Kalman Filter on GoPiGo3 Robot</a:t>
             </a:r>
             <a:r>
               <a:rPr b="0" lang="en-US" sz="1800" spc="-1" strike="noStrike">
+                <a:solidFill>
+                  <a:srgbClr val="000000"/>
+                </a:solidFill>
                 <a:latin typeface="Arial"/>
+                <a:ea typeface="DejaVu Sans"/>
               </a:rPr>
               <a:t>.” </a:t>
             </a:r>
@@ -9463,6 +9501,7 @@
                   <a:srgbClr val="ff0000"/>
                 </a:solidFill>
                 <a:latin typeface="Arial"/>
+                <a:ea typeface="DejaVu Sans"/>
               </a:rPr>
               <a:t>International Journal of Automation and Smart Technology. Scopus Journal.</a:t>
             </a:r>
@@ -9506,19 +9545,31 @@
             </a:pPr>
             <a:r>
               <a:rPr b="0" lang="en-US" sz="1800" spc="-1" strike="noStrike">
+                <a:solidFill>
+                  <a:srgbClr val="000000"/>
+                </a:solidFill>
                 <a:latin typeface="Arial"/>
+                <a:ea typeface="DejaVu Sans"/>
               </a:rPr>
               <a:t>Sharma, Monex, and Hari Kumar Voruganti. "</a:t>
             </a:r>
             <a:r>
               <a:rPr b="1" lang="en-US" sz="1800" spc="-1" strike="noStrike">
+                <a:solidFill>
+                  <a:srgbClr val="000000"/>
+                </a:solidFill>
                 <a:latin typeface="Arial"/>
+                <a:ea typeface="DejaVu Sans"/>
               </a:rPr>
               <a:t>Improved NSGA-II for offline coverage path planning with reactive velocity adaptation for moving obstacles in known environments.</a:t>
             </a:r>
             <a:r>
               <a:rPr b="0" lang="en-US" sz="1800" spc="-1" strike="noStrike">
+                <a:solidFill>
+                  <a:srgbClr val="000000"/>
+                </a:solidFill>
                 <a:latin typeface="Arial"/>
+                <a:ea typeface="DejaVu Sans"/>
               </a:rPr>
               <a:t>” </a:t>
             </a:r>
@@ -9528,6 +9579,7 @@
                   <a:srgbClr val="ff0000"/>
                 </a:solidFill>
                 <a:latin typeface="Arial"/>
+                <a:ea typeface="DejaVu Sans"/>
               </a:rPr>
               <a:t>Target Journal: Robotics and Autonomous Systems (RAS)</a:t>
             </a:r>
@@ -9571,6 +9623,9 @@
             </a:pPr>
             <a:r>
               <a:rPr b="0" lang="en-US" sz="1800" spc="-1" strike="noStrike">
+                <a:solidFill>
+                  <a:srgbClr val="000000"/>
+                </a:solidFill>
                 <a:latin typeface="Arial"/>
                 <a:ea typeface="Noto Sans CJK SC"/>
               </a:rPr>
@@ -9578,6 +9633,9 @@
             </a:r>
             <a:r>
               <a:rPr b="1" lang="en-US" sz="1800" spc="-1" strike="noStrike">
+                <a:solidFill>
+                  <a:srgbClr val="000000"/>
+                </a:solidFill>
                 <a:latin typeface="Arial"/>
                 <a:ea typeface="Noto Sans CJK SC"/>
               </a:rPr>
@@ -9585,6 +9643,9 @@
             </a:r>
             <a:r>
               <a:rPr b="0" lang="en-US" sz="1800" spc="-1" strike="noStrike">
+                <a:solidFill>
+                  <a:srgbClr val="000000"/>
+                </a:solidFill>
                 <a:latin typeface="Arial"/>
                 <a:ea typeface="Noto Sans CJK SC"/>
               </a:rPr>
@@ -9662,7 +9723,7 @@
         <p:spPr>
           <a:xfrm>
             <a:off x="829800" y="685800"/>
-            <a:ext cx="10142640" cy="5257440"/>
+            <a:ext cx="10142280" cy="5257080"/>
           </a:xfrm>
           <a:prstGeom prst="rect">
             <a:avLst/>
@@ -9691,7 +9752,11 @@
             </a:pPr>
             <a:r>
               <a:rPr b="1" lang="en-US" sz="2200" spc="-1" strike="noStrike">
+                <a:solidFill>
+                  <a:srgbClr val="000000"/>
+                </a:solidFill>
                 <a:latin typeface="Arial"/>
+                <a:ea typeface="DejaVu Sans"/>
               </a:rPr>
               <a:t>Conference Publications</a:t>
             </a:r>
@@ -9734,19 +9799,31 @@
             </a:pPr>
             <a:r>
               <a:rPr b="0" lang="en-US" sz="1800" spc="-1" strike="noStrike">
+                <a:solidFill>
+                  <a:srgbClr val="000000"/>
+                </a:solidFill>
                 <a:latin typeface="Arial"/>
+                <a:ea typeface="DejaVu Sans"/>
               </a:rPr>
               <a:t>Monex Sharma, and Hari Kumar Voruganti. "</a:t>
             </a:r>
             <a:r>
               <a:rPr b="1" lang="en-US" sz="1800" spc="-1" strike="noStrike">
+                <a:solidFill>
+                  <a:srgbClr val="000000"/>
+                </a:solidFill>
                 <a:latin typeface="Arial"/>
+                <a:ea typeface="DejaVu Sans"/>
               </a:rPr>
               <a:t>An Effective Genetic Algorithm based Multi-Objective Optimization Approach for Coverage Path Planning of Mobile Robot.</a:t>
             </a:r>
             <a:r>
               <a:rPr b="0" lang="en-US" sz="1800" spc="-1" strike="noStrike">
+                <a:solidFill>
+                  <a:srgbClr val="000000"/>
+                </a:solidFill>
                 <a:latin typeface="Arial"/>
+                <a:ea typeface="DejaVu Sans"/>
               </a:rPr>
               <a:t>" I</a:t>
             </a:r>
@@ -9756,12 +9833,17 @@
                   <a:srgbClr val="ff0000"/>
                 </a:solidFill>
                 <a:latin typeface="Arial"/>
+                <a:ea typeface="DejaVu Sans"/>
               </a:rPr>
               <a:t>nternational Conference on Advancements in Interdisciplinary Research (AIR-2022)</a:t>
             </a:r>
             <a:r>
               <a:rPr b="0" lang="en-US" sz="1800" spc="-1" strike="noStrike">
+                <a:solidFill>
+                  <a:srgbClr val="000000"/>
+                </a:solidFill>
                 <a:latin typeface="Arial"/>
+                <a:ea typeface="DejaVu Sans"/>
               </a:rPr>
               <a:t>, 6th - 7th May 2022 at MNNIT Allahabad, Prayagraj, India, Scopus Indexed.</a:t>
             </a:r>
@@ -9793,6 +9875,9 @@
             </a:pPr>
             <a:r>
               <a:rPr b="0" lang="en-US" sz="1800" spc="-1" strike="noStrike">
+                <a:solidFill>
+                  <a:srgbClr val="000000"/>
+                </a:solidFill>
                 <a:latin typeface="Arial"/>
                 <a:ea typeface="Noto Sans CJK SC"/>
               </a:rPr>
@@ -9800,6 +9885,9 @@
             </a:r>
             <a:r>
               <a:rPr b="1" lang="en-US" sz="1800" spc="-1" strike="noStrike">
+                <a:solidFill>
+                  <a:srgbClr val="000000"/>
+                </a:solidFill>
                 <a:latin typeface="Arial"/>
                 <a:ea typeface="Noto Sans CJK SC"/>
               </a:rPr>
@@ -9807,6 +9895,9 @@
             </a:r>
             <a:r>
               <a:rPr b="0" lang="en-US" sz="1800" spc="-1" strike="noStrike">
+                <a:solidFill>
+                  <a:srgbClr val="000000"/>
+                </a:solidFill>
                 <a:latin typeface="Arial"/>
                 <a:ea typeface="Noto Sans CJK SC"/>
               </a:rPr>
@@ -9830,31 +9921,7 @@
                 <a:latin typeface="Arial"/>
                 <a:ea typeface="Noto Sans CJK SC"/>
               </a:rPr>
-              <a:t>,</a:t>
-            </a:r>
-            <a:r>
-              <a:rPr b="0" lang="en-US" sz="1800" spc="-1" strike="noStrike">
-                <a:latin typeface="Arial"/>
-                <a:ea typeface="Noto Sans CJK SC"/>
-              </a:rPr>
-              <a:t> pp. 1-6. 2023, </a:t>
-            </a:r>
-            <a:r>
-              <a:rPr b="0" lang="en-US" sz="1800" spc="-1" strike="noStrike">
-                <a:solidFill>
-                  <a:srgbClr val="000000"/>
-                </a:solidFill>
-                <a:latin typeface="Arial"/>
-                <a:ea typeface="Noto Sans CJK SC"/>
-              </a:rPr>
-              <a:t>IIT Ropar</a:t>
-            </a:r>
-            <a:r>
-              <a:rPr b="0" lang="en-US" sz="1800" spc="-1" strike="noStrike">
-                <a:latin typeface="Arial"/>
-                <a:ea typeface="Noto Sans CJK SC"/>
-              </a:rPr>
-              <a:t>. Scopus Indexed.</a:t>
+              <a:t>, pp. 1-6. 2023, IIT Ropar. Scopus Indexed.</a:t>
             </a:r>
             <a:endParaRPr b="0" lang="en-US" sz="1800" spc="-1" strike="noStrike">
               <a:latin typeface="Arial"/>
@@ -9884,6 +9951,9 @@
             </a:pPr>
             <a:r>
               <a:rPr b="0" lang="en-US" sz="1800" spc="-1" strike="noStrike">
+                <a:solidFill>
+                  <a:srgbClr val="000000"/>
+                </a:solidFill>
                 <a:latin typeface="Arial"/>
                 <a:ea typeface="Noto Sans CJK SC"/>
               </a:rPr>
@@ -9891,6 +9961,9 @@
             </a:r>
             <a:r>
               <a:rPr b="1" lang="en-US" sz="1800" spc="-1" strike="noStrike">
+                <a:solidFill>
+                  <a:srgbClr val="000000"/>
+                </a:solidFill>
                 <a:latin typeface="Arial"/>
                 <a:ea typeface="Noto Sans CJK SC"/>
               </a:rPr>
@@ -9898,6 +9971,9 @@
             </a:r>
             <a:r>
               <a:rPr b="0" lang="en-US" sz="1800" spc="-1" strike="noStrike">
+                <a:solidFill>
+                  <a:srgbClr val="000000"/>
+                </a:solidFill>
                 <a:latin typeface="Arial"/>
                 <a:ea typeface="Noto Sans CJK SC"/>
               </a:rPr>
@@ -9915,27 +9991,13 @@
             </a:r>
             <a:r>
               <a:rPr b="0" lang="en-US" sz="1800" spc="-1" strike="noStrike">
+                <a:solidFill>
+                  <a:srgbClr val="000000"/>
+                </a:solidFill>
                 <a:latin typeface="Arial"/>
                 <a:ea typeface="Noto Sans CJK SC"/>
               </a:rPr>
-              <a:t>, 2023, </a:t>
-            </a:r>
-            <a:r>
-              <a:rPr b="0" lang="en-US" sz="1800" spc="-1" strike="noStrike">
-                <a:solidFill>
-                  <a:srgbClr val="000000"/>
-                </a:solidFill>
-                <a:latin typeface="Arial"/>
-                <a:ea typeface="Noto Sans CJK SC"/>
-              </a:rPr>
-              <a:t>IIT Guwahati</a:t>
-            </a:r>
-            <a:r>
-              <a:rPr b="0" lang="en-US" sz="1800" spc="-1" strike="noStrike">
-                <a:latin typeface="Arial"/>
-                <a:ea typeface="Noto Sans CJK SC"/>
-              </a:rPr>
-              <a:t>. Scopus Indexed.</a:t>
+              <a:t>, 2023, IIT Guwahati. Scopus Indexed.</a:t>
             </a:r>
             <a:endParaRPr b="0" lang="en-US" sz="1800" spc="-1" strike="noStrike">
               <a:latin typeface="Arial"/>
